--- a/slides/build/aula-02-banco-de-dados-e-activerecord.pptx
+++ b/slides/build/aula-02-banco-de-dados-e-activerecord.pptx
@@ -4329,7 +4329,7 @@
                 <a:cs typeface="Open Sans Extra Bold"/>
                 <a:sym typeface="Open Sans Extra Bold"/>
               </a:rPr>
-              <a:t>Não é para nunca mais ver SQL — é para não escrever o trivial.</a:t>
+              <a:t>Não é para nunca mais ver SQL. É para não escrever o trivial.</a:t>
             </a:r>
           </a:p>
           <a:p>
@@ -6833,7 +6833,7 @@
                 <a:cs typeface="Open Sans Extra Bold"/>
                 <a:sym typeface="Open Sans Extra Bold"/>
               </a:rPr>
-              <a:t>t.timestamps cria created_at e updated_at — o Rails mantém sozinho.</a:t>
+              <a:t>t.timestamps cria created_at e updated_at, e o Rails mantém sozinho.</a:t>
             </a:r>
           </a:p>
           <a:p>
@@ -7195,7 +7195,7 @@
                 <a:cs typeface="Open Sans Extra Bold"/>
                 <a:sym typeface="Open Sans Extra Bold"/>
               </a:rPr>
-              <a:t>É ele que cria o banco de teste — por isso vai versionado.</a:t>
+              <a:t>É ele que cria o banco de teste. Por isso vai versionado.</a:t>
             </a:r>
           </a:p>
           <a:p>
@@ -8310,7 +8310,7 @@
                 <a:cs typeface="Open Sans Extra Bold"/>
                 <a:sym typeface="Open Sans Extra Bold"/>
               </a:rPr>
-              <a:t>SHA-256 é rápido — e é esse o problema.</a:t>
+              <a:t>SHA-256 é rápido: e é esse o problema.</a:t>
             </a:r>
           </a:p>
           <a:p>
@@ -9824,13 +9824,13 @@
           <a:p>
             <a:pPr algn="l" marL="1136378" indent="-568189" lvl="1">
               <a:lnSpc>
-                <a:spcPts val="4989"/>
+                <a:spcPts val="5405"/>
               </a:lnSpc>
               <a:buFont typeface="Arial"/>
               <a:buChar char="•"/>
             </a:pPr>
             <a:r>
-              <a:rPr lang="en-US" sz="3157">
+              <a:rPr lang="en-US" sz="3420">
                 <a:solidFill>
                   <a:srgbClr val="000000"/>
                 </a:solidFill>
@@ -9845,13 +9845,13 @@
           <a:p>
             <a:pPr algn="l" marL="1136378" indent="-568189" lvl="1">
               <a:lnSpc>
-                <a:spcPts val="4989"/>
+                <a:spcPts val="5405"/>
               </a:lnSpc>
               <a:buFont typeface="Arial"/>
               <a:buChar char="•"/>
             </a:pPr>
             <a:r>
-              <a:rPr lang="en-US" sz="3157">
+              <a:rPr lang="en-US" sz="3420">
                 <a:solidFill>
                   <a:srgbClr val="000000"/>
                 </a:solidFill>
@@ -9866,13 +9866,13 @@
           <a:p>
             <a:pPr algn="l" marL="1136378" indent="-568189" lvl="1">
               <a:lnSpc>
-                <a:spcPts val="4989"/>
+                <a:spcPts val="5405"/>
               </a:lnSpc>
               <a:buFont typeface="Arial"/>
               <a:buChar char="•"/>
             </a:pPr>
             <a:r>
-              <a:rPr lang="en-US" sz="3157">
+              <a:rPr lang="en-US" sz="3420">
                 <a:solidFill>
                   <a:srgbClr val="000000"/>
                 </a:solidFill>
@@ -9881,19 +9881,19 @@
                 <a:cs typeface="Open Sans Extra Bold"/>
                 <a:sym typeface="Open Sans Extra Bold"/>
               </a:rPr>
-              <a:t>on: :create só valida na criação — termos se aceitam uma vez.</a:t>
+              <a:t>on: :create só valida na criação. Termos se aceitam uma vez.</a:t>
             </a:r>
           </a:p>
           <a:p>
             <a:pPr algn="l" marL="1136378" indent="-568189" lvl="1">
               <a:lnSpc>
-                <a:spcPts val="4989"/>
+                <a:spcPts val="5405"/>
               </a:lnSpc>
               <a:buFont typeface="Arial"/>
               <a:buChar char="•"/>
             </a:pPr>
             <a:r>
-              <a:rPr lang="en-US" sz="3157">
+              <a:rPr lang="en-US" sz="3420">
                 <a:solidFill>
                   <a:srgbClr val="000000"/>
                 </a:solidFill>
@@ -9902,19 +9902,19 @@
                 <a:cs typeface="Open Sans Extra Bold"/>
                 <a:sym typeface="Open Sans Extra Bold"/>
               </a:rPr>
-              <a:t>if: recebe um lambda — na edição de perfil não há senha para validar.</a:t>
+              <a:t>if: recebe um lambda. Na edição de perfil não há senha para validar.</a:t>
             </a:r>
           </a:p>
           <a:p>
             <a:pPr algn="l" marL="1136378" indent="-568189" lvl="1">
               <a:lnSpc>
-                <a:spcPts val="4989"/>
+                <a:spcPts val="5405"/>
               </a:lnSpc>
               <a:buFont typeface="Arial"/>
               <a:buChar char="•"/>
             </a:pPr>
             <a:r>
-              <a:rPr lang="en-US" sz="3157">
+              <a:rPr lang="en-US" sz="3420">
                 <a:solidFill>
                   <a:srgbClr val="000000"/>
                 </a:solidFill>
@@ -15992,7 +15992,7 @@
                 <a:cs typeface="Open Sans Extra Bold"/>
                 <a:sym typeface="Open Sans Extra Bold"/>
               </a:rPr>
-              <a:t>Emita um código, confirme, e tente confirmar de novo — tem que recusar.</a:t>
+              <a:t>Emita um código, confirme, e tente confirmar de novo. Tem que recusar.</a:t>
             </a:r>
           </a:p>
           <a:p>
@@ -16701,7 +16701,7 @@
                 <a:cs typeface="Open Sans Extra Bold"/>
                 <a:sym typeface="Open Sans Extra Bold"/>
               </a:rPr>
-              <a:t>Cada linha tem um id único — a chave primária.</a:t>
+              <a:t>Cada linha tem um id único: a chave primária.</a:t>
             </a:r>
           </a:p>
           <a:p>

--- a/slides/build/aula-02-banco-de-dados-e-activerecord.pptx
+++ b/slides/build/aula-02-banco-de-dados-e-activerecord.pptx
@@ -4670,7 +4670,7 @@
                 <a:cs typeface="Open Sans Extra Bold"/>
                 <a:sym typeface="Open Sans Extra Bold"/>
               </a:rPr>
-              <a:t>PRÁTICA 1 — O BANCO DE PÉ, E O BCRYPT</a:t>
+              <a:t>PRÁTICA 1: O BANCO DE PÉ, E O BCRYPT</a:t>
             </a:r>
           </a:p>
         </p:txBody>
@@ -8478,7 +8478,7 @@
                 <a:cs typeface="Open Sans Extra Bold"/>
                 <a:sym typeface="Open Sans Extra Bold"/>
               </a:rPr>
-              <a:t>PRÁTICA 2 — AS TRÊS MIGRATIONS</a:t>
+              <a:t>PRÁTICA 2: AS TRÊS MIGRATIONS</a:t>
             </a:r>
           </a:p>
         </p:txBody>
@@ -10456,7 +10456,7 @@
                 <a:cs typeface="Open Sans Extra Bold"/>
                 <a:sym typeface="Open Sans Extra Bold"/>
               </a:rPr>
-              <a:t>PRÁTICA 3 — O BCRYPT NO CONSOLE</a:t>
+              <a:t>PRÁTICA 3: O BCRYPT NO CONSOLE</a:t>
             </a:r>
           </a:p>
         </p:txBody>
@@ -12086,7 +12086,7 @@
                 <a:cs typeface="Open Sans Extra Bold"/>
                 <a:sym typeface="Open Sans Extra Bold"/>
               </a:rPr>
-              <a:t>PRÁTICAS 4 E 5 — O VALIDADOR E O MODEL</a:t>
+              <a:t>PRÁTICAS 4 E 5: O VALIDADOR E O MODEL</a:t>
             </a:r>
           </a:p>
         </p:txBody>
@@ -14794,7 +14794,7 @@
                 <a:cs typeface="Open Sans Extra Bold"/>
                 <a:sym typeface="Open Sans Extra Bold"/>
               </a:rPr>
-              <a:t>PRÁTICA 6 — A SEGUNDA TABELA</a:t>
+              <a:t>PRÁTICA 6: A SEGUNDA TABELA</a:t>
             </a:r>
           </a:p>
         </p:txBody>
@@ -16396,7 +16396,7 @@
                 <a:cs typeface="Open Sans Extra Bold"/>
                 <a:sym typeface="Open Sans Extra Bold"/>
               </a:rPr>
-              <a:t>PRÁTICA 7 — OS DOIS CONCERNS</a:t>
+              <a:t>PRÁTICA 7: OS DOIS CONCERNS</a:t>
             </a:r>
           </a:p>
         </p:txBody>
@@ -18496,7 +18496,7 @@
                 <a:cs typeface="Open Sans Extra Bold"/>
                 <a:sym typeface="Open Sans Extra Bold"/>
               </a:rPr>
-              <a:t>PRÁTICA 8 — FIXTURES, TESTES E COMMIT</a:t>
+              <a:t>PRÁTICA 8: FIXTURES, TESTES E COMMIT</a:t>
             </a:r>
           </a:p>
         </p:txBody>

--- a/slides/build/aula-02-banco-de-dados-e-activerecord.pptx
+++ b/slides/build/aula-02-banco-de-dados-e-activerecord.pptx
@@ -8605,7 +8605,7 @@
                 <a:cs typeface="Open Sans Extra Bold"/>
                 <a:sym typeface="Open Sans Extra Bold"/>
               </a:rPr>
-              <a:t>Confere: a tabela users tem 17 colunas (16 mais o id).</a:t>
+              <a:t>Confere: a tabela users fica com 16 colunas.</a:t>
             </a:r>
           </a:p>
           <a:p>

--- a/slides/build/aula-02-banco-de-dados-e-activerecord.pptx
+++ b/slides/build/aula-02-banco-de-dados-e-activerecord.pptx
@@ -1044,17 +1044,17 @@
           </a:p>
           <a:p>
             <a:r>
-              <a:t>A comparação de tempo é o argumento: bcrypt em centenas de ms, SHA-256</a:t>
-            </a:r>
-          </a:p>
-          <a:p>
-            <a:r>
-              <a:t>em microssegundos. Quem rouba um banco testa bilhões de senhas por</a:t>
-            </a:r>
-          </a:p>
-          <a:p>
-            <a:r>
-              <a:t>segundo com SHA-256, e algumas dezenas com bcrypt.</a:t>
+              <a:t>A comparação é o argumento, e o comando é feito para não depender da</a:t>
+            </a:r>
+          </a:p>
+          <a:p>
+            <a:r>
+              <a:t>máquina: mil SHA-256 terminam muito antes de UM bcrypt. Quem rouba um</a:t>
+            </a:r>
+          </a:p>
+          <a:p>
+            <a:r>
+              <a:t>banco testa senha em lote, e é isso que o bcrypt inviabiliza.</a:t>
             </a:r>
           </a:p>
         </p:txBody>
@@ -10562,7 +10562,7 @@
                 <a:cs typeface="Open Sans Extra Bold"/>
                 <a:sym typeface="Open Sans Extra Bold"/>
               </a:rPr>
-              <a:t>Compare o tempo com Digest::SHA256, usando Benchmark.realtime.</a:t>
+              <a:t>Compare: UM bcrypt contra MIL SHA-256, com Benchmark.realtime.</a:t>
             </a:r>
           </a:p>
           <a:p>

--- a/slides/build/aula-02-banco-de-dados-e-activerecord.pptx
+++ b/slides/build/aula-02-banco-de-dados-e-activerecord.pptx
@@ -644,7 +644,27 @@
           <a:lstStyle/>
           <a:p>
             <a:r>
-              <a:t>Guardar esse método: ele é usado na Aula 3, no login.</a:t>
+              <a:t>~35 minutos somando as duas. É o bloco em que eles mais escrevem hoje.</a:t>
+            </a:r>
+          </a:p>
+          <a:p>
+            <a:r>
+              <a:t>Repare no validator com eles: tem o self.validate que instancia, o @ de</a:t>
+            </a:r>
+          </a:p>
+          <a:p>
+            <a:r>
+              <a:t>instância e o private valendo da linha em diante. É a Aula 1 aparecendo.</a:t>
+            </a:r>
+          </a:p>
+          <a:p>
+            <a:r>
+              <a:t>Quando valid? der false e ninguém souber por quê, a resposta é sempre</a:t>
+            </a:r>
+          </a:p>
+          <a:p>
+            <a:r>
+              <a:t>p u.errors.full_messages. Ensine o reflexo.</a:t>
             </a:r>
           </a:p>
         </p:txBody>
@@ -714,6 +734,481 @@
           <a:lstStyle/>
           <a:p>
             <a:r>
+              <a:t>Se der, mostre no log ao vivo: rode o each sem includes e conte as linhas</a:t>
+            </a:r>
+          </a:p>
+          <a:p>
+            <a:r>
+              <a:t>de SELECT na tela. Ver 101 consultas rolando convence mais que o slide.</a:t>
+            </a:r>
+          </a:p>
+          <a:p>
+            <a:r>
+              <a:t>É o bônus 1 da Prática 8, para quem terminar antes.</a:t>
+            </a:r>
+          </a:p>
+        </p:txBody>
+      </p:sp>
+      <p:sp>
+        <p:nvSpPr>
+          <p:cNvPr id="4" name="Slide Number Placeholder 3"/>
+          <p:cNvSpPr>
+            <a:spLocks noGrp="1"/>
+          </p:cNvSpPr>
+          <p:nvPr>
+            <p:ph type="sldNum" idx="5" sz="quarter"/>
+          </p:nvPr>
+        </p:nvSpPr>
+        <p:spPr/>
+      </p:sp>
+    </p:spTree>
+  </p:cSld>
+  <p:clrMapOvr>
+    <a:masterClrMapping/>
+  </p:clrMapOvr>
+</p:notes>
+</file>
+
+<file path=ppt/notesSlides/notesSlide12.xml><?xml version="1.0" encoding="utf-8"?>
+<p:notes xmlns:a="http://schemas.openxmlformats.org/drawingml/2006/main" xmlns:p="http://schemas.openxmlformats.org/presentationml/2006/main" xmlns:r="http://schemas.openxmlformats.org/officeDocument/2006/relationships">
+  <p:cSld>
+    <p:spTree>
+      <p:nvGrpSpPr>
+        <p:cNvPr id="1" name=""/>
+        <p:cNvGrpSpPr/>
+        <p:nvPr/>
+      </p:nvGrpSpPr>
+      <p:grpSpPr>
+        <a:xfrm>
+          <a:off x="0" y="0"/>
+          <a:ext cx="0" cy="0"/>
+          <a:chOff x="0" y="0"/>
+          <a:chExt cx="0" cy="0"/>
+        </a:xfrm>
+      </p:grpSpPr>
+      <p:sp>
+        <p:nvSpPr>
+          <p:cNvPr id="2" name="Slide Image Placeholder 1"/>
+          <p:cNvSpPr>
+            <a:spLocks noGrp="1"/>
+          </p:cNvSpPr>
+          <p:nvPr>
+            <p:ph type="sldImg" idx="2"/>
+          </p:nvPr>
+        </p:nvSpPr>
+        <p:spPr/>
+      </p:sp>
+      <p:sp>
+        <p:nvSpPr>
+          <p:cNvPr id="3" name="Notes Placeholder 2"/>
+          <p:cNvSpPr>
+            <a:spLocks noGrp="1"/>
+          </p:cNvSpPr>
+          <p:nvPr>
+            <p:ph type="body" idx="3" sz="quarter"/>
+          </p:nvPr>
+        </p:nvSpPr>
+        <p:spPr/>
+        <p:txBody>
+          <a:bodyPr/>
+          <a:lstStyle/>
+          <a:p>
+            <a:r>
+              <a:t>~15 minutos. É aqui que o banco deixa de ser uma tabela e vira um</a:t>
+            </a:r>
+          </a:p>
+          <a:p>
+            <a:r>
+              <a:t>modelo de dados.</a:t>
+            </a:r>
+          </a:p>
+          <a:p>
+            <a:r>
+              <a:t>O dependent: :delete_all é o exercício avançado, e vale fazer ao vivo:</a:t>
+            </a:r>
+          </a:p>
+          <a:p>
+            <a:r>
+              <a:t>LoginEvent.count antes e depois do destroy.</a:t>
+            </a:r>
+          </a:p>
+        </p:txBody>
+      </p:sp>
+      <p:sp>
+        <p:nvSpPr>
+          <p:cNvPr id="4" name="Slide Number Placeholder 3"/>
+          <p:cNvSpPr>
+            <a:spLocks noGrp="1"/>
+          </p:cNvSpPr>
+          <p:nvPr>
+            <p:ph type="sldNum" idx="5" sz="quarter"/>
+          </p:nvPr>
+        </p:nvSpPr>
+        <p:spPr/>
+      </p:sp>
+    </p:spTree>
+  </p:cSld>
+  <p:clrMapOvr>
+    <a:masterClrMapping/>
+  </p:clrMapOvr>
+</p:notes>
+</file>
+
+<file path=ppt/notesSlides/notesSlide13.xml><?xml version="1.0" encoding="utf-8"?>
+<p:notes xmlns:a="http://schemas.openxmlformats.org/drawingml/2006/main" xmlns:p="http://schemas.openxmlformats.org/presentationml/2006/main" xmlns:r="http://schemas.openxmlformats.org/officeDocument/2006/relationships">
+  <p:cSld>
+    <p:spTree>
+      <p:nvGrpSpPr>
+        <p:cNvPr id="1" name=""/>
+        <p:cNvGrpSpPr/>
+        <p:nvPr/>
+      </p:nvGrpSpPr>
+      <p:grpSpPr>
+        <a:xfrm>
+          <a:off x="0" y="0"/>
+          <a:ext cx="0" cy="0"/>
+          <a:chOff x="0" y="0"/>
+          <a:chExt cx="0" cy="0"/>
+        </a:xfrm>
+      </p:grpSpPr>
+      <p:sp>
+        <p:nvSpPr>
+          <p:cNvPr id="2" name="Slide Image Placeholder 1"/>
+          <p:cNvSpPr>
+            <a:spLocks noGrp="1"/>
+          </p:cNvSpPr>
+          <p:nvPr>
+            <p:ph type="sldImg" idx="2"/>
+          </p:nvPr>
+        </p:nvSpPr>
+        <p:spPr/>
+      </p:sp>
+      <p:sp>
+        <p:nvSpPr>
+          <p:cNvPr id="3" name="Notes Placeholder 2"/>
+          <p:cNvSpPr>
+            <a:spLocks noGrp="1"/>
+          </p:cNvSpPr>
+          <p:nvPr>
+            <p:ph type="body" idx="3" sz="quarter"/>
+          </p:nvPr>
+        </p:nvSpPr>
+        <p:spPr/>
+        <p:txBody>
+          <a:bodyPr/>
+          <a:lstStyle/>
+          <a:p>
+            <a:r>
+              <a:t>A pergunta boa: "quando eu tiro para um concern e quando deixo no model?"</a:t>
+            </a:r>
+          </a:p>
+          <a:p>
+            <a:r>
+              <a:t>A regra prática: quando o assunto tem começo, meio e fim próprios.</a:t>
+            </a:r>
+          </a:p>
+          <a:p>
+            <a:r>
+              <a:t>Verificar e-mail é um assunto inteiro; validar o nome não é.</a:t>
+            </a:r>
+          </a:p>
+        </p:txBody>
+      </p:sp>
+      <p:sp>
+        <p:nvSpPr>
+          <p:cNvPr id="4" name="Slide Number Placeholder 3"/>
+          <p:cNvSpPr>
+            <a:spLocks noGrp="1"/>
+          </p:cNvSpPr>
+          <p:nvPr>
+            <p:ph type="sldNum" idx="5" sz="quarter"/>
+          </p:nvPr>
+        </p:nvSpPr>
+        <p:spPr/>
+      </p:sp>
+    </p:spTree>
+  </p:cSld>
+  <p:clrMapOvr>
+    <a:masterClrMapping/>
+  </p:clrMapOvr>
+</p:notes>
+</file>
+
+<file path=ppt/notesSlides/notesSlide14.xml><?xml version="1.0" encoding="utf-8"?>
+<p:notes xmlns:a="http://schemas.openxmlformats.org/drawingml/2006/main" xmlns:p="http://schemas.openxmlformats.org/presentationml/2006/main" xmlns:r="http://schemas.openxmlformats.org/officeDocument/2006/relationships">
+  <p:cSld>
+    <p:spTree>
+      <p:nvGrpSpPr>
+        <p:cNvPr id="1" name=""/>
+        <p:cNvGrpSpPr/>
+        <p:nvPr/>
+      </p:nvGrpSpPr>
+      <p:grpSpPr>
+        <a:xfrm>
+          <a:off x="0" y="0"/>
+          <a:ext cx="0" cy="0"/>
+          <a:chOff x="0" y="0"/>
+          <a:chExt cx="0" cy="0"/>
+        </a:xfrm>
+      </p:grpSpPr>
+      <p:sp>
+        <p:nvSpPr>
+          <p:cNvPr id="2" name="Slide Image Placeholder 1"/>
+          <p:cNvSpPr>
+            <a:spLocks noGrp="1"/>
+          </p:cNvSpPr>
+          <p:nvPr>
+            <p:ph type="sldImg" idx="2"/>
+          </p:nvPr>
+        </p:nvSpPr>
+        <p:spPr/>
+      </p:sp>
+      <p:sp>
+        <p:nvSpPr>
+          <p:cNvPr id="3" name="Notes Placeholder 2"/>
+          <p:cNvSpPr>
+            <a:spLocks noGrp="1"/>
+          </p:cNvSpPr>
+          <p:nvPr>
+            <p:ph type="body" idx="3" sz="quarter"/>
+          </p:nvPr>
+        </p:nvSpPr>
+        <p:spPr/>
+        <p:txBody>
+          <a:bodyPr/>
+          <a:lstStyle/>
+          <a:p>
+            <a:r>
+              <a:t>~20 minutos. O momento em que o módulo da Aula 1 deixa de ser teoria.</a:t>
+            </a:r>
+          </a:p>
+          <a:p>
+            <a:r>
+              <a:t>O ponto a martelar: o banco guarda o digest do código, não o código.</a:t>
+            </a:r>
+          </a:p>
+          <a:p>
+            <a:r>
+              <a:t>Mesma lição da senha, aplicada a outra coisa. Se alguém vazar o banco,</a:t>
+            </a:r>
+          </a:p>
+          <a:p>
+            <a:r>
+              <a:t>não consegue confirmar a conta de ninguém.</a:t>
+            </a:r>
+          </a:p>
+        </p:txBody>
+      </p:sp>
+      <p:sp>
+        <p:nvSpPr>
+          <p:cNvPr id="4" name="Slide Number Placeholder 3"/>
+          <p:cNvSpPr>
+            <a:spLocks noGrp="1"/>
+          </p:cNvSpPr>
+          <p:nvPr>
+            <p:ph type="sldNum" idx="5" sz="quarter"/>
+          </p:nvPr>
+        </p:nvSpPr>
+        <p:spPr/>
+      </p:sp>
+    </p:spTree>
+  </p:cSld>
+  <p:clrMapOvr>
+    <a:masterClrMapping/>
+  </p:clrMapOvr>
+</p:notes>
+</file>
+
+<file path=ppt/notesSlides/notesSlide15.xml><?xml version="1.0" encoding="utf-8"?>
+<p:notes xmlns:a="http://schemas.openxmlformats.org/drawingml/2006/main" xmlns:p="http://schemas.openxmlformats.org/presentationml/2006/main" xmlns:r="http://schemas.openxmlformats.org/officeDocument/2006/relationships">
+  <p:cSld>
+    <p:spTree>
+      <p:nvGrpSpPr>
+        <p:cNvPr id="1" name=""/>
+        <p:cNvGrpSpPr/>
+        <p:nvPr/>
+      </p:nvGrpSpPr>
+      <p:grpSpPr>
+        <a:xfrm>
+          <a:off x="0" y="0"/>
+          <a:ext cx="0" cy="0"/>
+          <a:chOff x="0" y="0"/>
+          <a:chExt cx="0" cy="0"/>
+        </a:xfrm>
+      </p:grpSpPr>
+      <p:sp>
+        <p:nvSpPr>
+          <p:cNvPr id="2" name="Slide Image Placeholder 1"/>
+          <p:cNvSpPr>
+            <a:spLocks noGrp="1"/>
+          </p:cNvSpPr>
+          <p:nvPr>
+            <p:ph type="sldImg" idx="2"/>
+          </p:nvPr>
+        </p:nvSpPr>
+        <p:spPr/>
+      </p:sp>
+      <p:sp>
+        <p:nvSpPr>
+          <p:cNvPr id="3" name="Notes Placeholder 2"/>
+          <p:cNvSpPr>
+            <a:spLocks noGrp="1"/>
+          </p:cNvSpPr>
+          <p:nvPr>
+            <p:ph type="body" idx="3" sz="quarter"/>
+          </p:nvPr>
+        </p:nvSpPr>
+        <p:spPr/>
+        <p:txBody>
+          <a:bodyPr/>
+          <a:lstStyle/>
+          <a:p>
+            <a:r>
+              <a:t>Rode ao vivo. Mostrar o password_digest na tela é o momento em que a</a:t>
+            </a:r>
+          </a:p>
+          <a:p>
+            <a:r>
+              <a:t>ficha cai sobre hashing.</a:t>
+            </a:r>
+          </a:p>
+        </p:txBody>
+      </p:sp>
+      <p:sp>
+        <p:nvSpPr>
+          <p:cNvPr id="4" name="Slide Number Placeholder 3"/>
+          <p:cNvSpPr>
+            <a:spLocks noGrp="1"/>
+          </p:cNvSpPr>
+          <p:nvPr>
+            <p:ph type="sldNum" idx="5" sz="quarter"/>
+          </p:nvPr>
+        </p:nvSpPr>
+        <p:spPr/>
+      </p:sp>
+    </p:spTree>
+  </p:cSld>
+  <p:clrMapOvr>
+    <a:masterClrMapping/>
+  </p:clrMapOvr>
+</p:notes>
+</file>
+
+<file path=ppt/notesSlides/notesSlide16.xml><?xml version="1.0" encoding="utf-8"?>
+<p:notes xmlns:a="http://schemas.openxmlformats.org/drawingml/2006/main" xmlns:p="http://schemas.openxmlformats.org/presentationml/2006/main" xmlns:r="http://schemas.openxmlformats.org/officeDocument/2006/relationships">
+  <p:cSld>
+    <p:spTree>
+      <p:nvGrpSpPr>
+        <p:cNvPr id="1" name=""/>
+        <p:cNvGrpSpPr/>
+        <p:nvPr/>
+      </p:nvGrpSpPr>
+      <p:grpSpPr>
+        <a:xfrm>
+          <a:off x="0" y="0"/>
+          <a:ext cx="0" cy="0"/>
+          <a:chOff x="0" y="0"/>
+          <a:chExt cx="0" cy="0"/>
+        </a:xfrm>
+      </p:grpSpPr>
+      <p:sp>
+        <p:nvSpPr>
+          <p:cNvPr id="2" name="Slide Image Placeholder 1"/>
+          <p:cNvSpPr>
+            <a:spLocks noGrp="1"/>
+          </p:cNvSpPr>
+          <p:nvPr>
+            <p:ph type="sldImg" idx="2"/>
+          </p:nvPr>
+        </p:nvSpPr>
+        <p:spPr/>
+      </p:sp>
+      <p:sp>
+        <p:nvSpPr>
+          <p:cNvPr id="3" name="Notes Placeholder 2"/>
+          <p:cNvSpPr>
+            <a:spLocks noGrp="1"/>
+          </p:cNvSpPr>
+          <p:nvPr>
+            <p:ph type="body" idx="3" sz="quarter"/>
+          </p:nvPr>
+        </p:nvSpPr>
+        <p:spPr/>
+        <p:txBody>
+          <a:bodyPr/>
+          <a:lstStyle/>
+          <a:p>
+            <a:r>
+              <a:t>Guardar esse método: ele é usado na Aula 3, no login.</a:t>
+            </a:r>
+          </a:p>
+        </p:txBody>
+      </p:sp>
+      <p:sp>
+        <p:nvSpPr>
+          <p:cNvPr id="4" name="Slide Number Placeholder 3"/>
+          <p:cNvSpPr>
+            <a:spLocks noGrp="1"/>
+          </p:cNvSpPr>
+          <p:nvPr>
+            <p:ph type="sldNum" idx="5" sz="quarter"/>
+          </p:nvPr>
+        </p:nvSpPr>
+        <p:spPr/>
+      </p:sp>
+    </p:spTree>
+  </p:cSld>
+  <p:clrMapOvr>
+    <a:masterClrMapping/>
+  </p:clrMapOvr>
+</p:notes>
+</file>
+
+<file path=ppt/notesSlides/notesSlide17.xml><?xml version="1.0" encoding="utf-8"?>
+<p:notes xmlns:a="http://schemas.openxmlformats.org/drawingml/2006/main" xmlns:p="http://schemas.openxmlformats.org/presentationml/2006/main" xmlns:r="http://schemas.openxmlformats.org/officeDocument/2006/relationships">
+  <p:cSld>
+    <p:spTree>
+      <p:nvGrpSpPr>
+        <p:cNvPr id="1" name=""/>
+        <p:cNvGrpSpPr/>
+        <p:nvPr/>
+      </p:nvGrpSpPr>
+      <p:grpSpPr>
+        <a:xfrm>
+          <a:off x="0" y="0"/>
+          <a:ext cx="0" cy="0"/>
+          <a:chOff x="0" y="0"/>
+          <a:chExt cx="0" cy="0"/>
+        </a:xfrm>
+      </p:grpSpPr>
+      <p:sp>
+        <p:nvSpPr>
+          <p:cNvPr id="2" name="Slide Image Placeholder 1"/>
+          <p:cNvSpPr>
+            <a:spLocks noGrp="1"/>
+          </p:cNvSpPr>
+          <p:nvPr>
+            <p:ph type="sldImg" idx="2"/>
+          </p:nvPr>
+        </p:nvSpPr>
+        <p:spPr/>
+      </p:sp>
+      <p:sp>
+        <p:nvSpPr>
+          <p:cNvPr id="3" name="Notes Placeholder 2"/>
+          <p:cNvSpPr>
+            <a:spLocks noGrp="1"/>
+          </p:cNvSpPr>
+          <p:nvPr>
+            <p:ph type="body" idx="3" sz="quarter"/>
+          </p:nvPr>
+        </p:nvSpPr>
+        <p:spPr/>
+        <p:txBody>
+          <a:bodyPr/>
+          <a:lstStyle/>
+          <a:p>
+            <a:r>
               <a:t>~25 minutos. Fecha o dia e é a base da Aula 3.</a:t>
             </a:r>
           </a:p>
@@ -944,27 +1439,22 @@
           <a:lstStyle/>
           <a:p>
             <a:r>
-              <a:t>~20 minutos, a prática mais longa do dia.</a:t>
-            </a:r>
-          </a:p>
-          <a:p>
-            <a:r>
-              <a:t>Erro campeão: PG::DuplicateTable, de quem rodou duas vezes. A saída é</a:t>
-            </a:r>
-          </a:p>
-          <a:p>
-            <a:r>
-              <a:t>db:drop db:create db:migrate — perde dados, e tudo bem agora.</a:t>
-            </a:r>
-          </a:p>
-          <a:p>
-            <a:r>
-              <a:t>Insista: quando uma migration falha, a resposta está na LINHA SEGUINTE</a:t>
-            </a:r>
-          </a:p>
-          <a:p>
-            <a:r>
-              <a:t>do erro, não na primeira.</a:t>
+              <a:t>Este slide é sobre concorrência, e é sutil. Desenhe no quadro se</a:t>
+            </a:r>
+          </a:p>
+          <a:p>
+            <a:r>
+              <a:t>precisar: duas requisições chegam no mesmo milissegundo, as duas</a:t>
+            </a:r>
+          </a:p>
+          <a:p>
+            <a:r>
+              <a:t>consultam, as duas não acham ninguém, as duas passam na validação. Só</a:t>
+            </a:r>
+          </a:p>
+          <a:p>
+            <a:r>
+              <a:t>uma vence o índice. Sem ele, o banco fica com duplicata.</a:t>
             </a:r>
           </a:p>
         </p:txBody>
@@ -1034,27 +1524,27 @@
           <a:lstStyle/>
           <a:p>
             <a:r>
-              <a:t>~10 minutos, sem escrever arquivo nenhum. É o que faz a seção de senha</a:t>
-            </a:r>
-          </a:p>
-          <a:p>
-            <a:r>
-              <a:t>parar de ser teoria.</a:t>
-            </a:r>
-          </a:p>
-          <a:p>
-            <a:r>
-              <a:t>A comparação é o argumento, e o comando é feito para não depender da</a:t>
-            </a:r>
-          </a:p>
-          <a:p>
-            <a:r>
-              <a:t>máquina: mil SHA-256 terminam muito antes de UM bcrypt. Quem rouba um</a:t>
-            </a:r>
-          </a:p>
-          <a:p>
-            <a:r>
-              <a:t>banco testa senha em lote, e é isso que o bcrypt inviabiliza.</a:t>
+              <a:t>~20 minutos, a prática mais longa do dia.</a:t>
+            </a:r>
+          </a:p>
+          <a:p>
+            <a:r>
+              <a:t>Erro campeão: PG::DuplicateTable, de quem rodou duas vezes. A saída é</a:t>
+            </a:r>
+          </a:p>
+          <a:p>
+            <a:r>
+              <a:t>db:drop db:create db:migrate — perde dados, e tudo bem agora.</a:t>
+            </a:r>
+          </a:p>
+          <a:p>
+            <a:r>
+              <a:t>Insista: quando uma migration falha, a resposta está na LINHA SEGUINTE</a:t>
+            </a:r>
+          </a:p>
+          <a:p>
+            <a:r>
+              <a:t>do erro, não na primeira.</a:t>
             </a:r>
           </a:p>
         </p:txBody>
@@ -1124,27 +1614,22 @@
           <a:lstStyle/>
           <a:p>
             <a:r>
-              <a:t>~35 minutos somando as duas. É o bloco em que eles mais escrevem hoje.</a:t>
-            </a:r>
-          </a:p>
-          <a:p>
-            <a:r>
-              <a:t>Repare no validator com eles: tem o self.validate que instancia, o @ de</a:t>
-            </a:r>
-          </a:p>
-          <a:p>
-            <a:r>
-              <a:t>instância e o private valendo da linha em diante. É a Aula 1 aparecendo.</a:t>
-            </a:r>
-          </a:p>
-          <a:p>
-            <a:r>
-              <a:t>Quando valid? der false e ninguém souber por quê, a resposta é sempre</a:t>
-            </a:r>
-          </a:p>
-          <a:p>
-            <a:r>
-              <a:t>p u.errors.full_messages. Ensine o reflexo.</a:t>
+              <a:t>A pergunta que sempre vem: "e se eu esquecer a senha, vocês me mandam</a:t>
+            </a:r>
+          </a:p>
+          <a:p>
+            <a:r>
+              <a:t>ela?" Não, e nem conseguimos. Se um site te manda a sua senha antiga</a:t>
+            </a:r>
+          </a:p>
+          <a:p>
+            <a:r>
+              <a:t>por e-mail, ele guardou em texto, e você deveria trocar a senha em</a:t>
+            </a:r>
+          </a:p>
+          <a:p>
+            <a:r>
+              <a:t>todo lugar onde usou aquela.</a:t>
             </a:r>
           </a:p>
         </p:txBody>
@@ -1214,22 +1699,22 @@
           <a:lstStyle/>
           <a:p>
             <a:r>
-              <a:t>~15 minutos. É aqui que o banco deixa de ser uma tabela e vira um</a:t>
-            </a:r>
-          </a:p>
-          <a:p>
-            <a:r>
-              <a:t>modelo de dados.</a:t>
-            </a:r>
-          </a:p>
-          <a:p>
-            <a:r>
-              <a:t>O dependent: :delete_all é o exercício avançado, e vale fazer ao vivo:</a:t>
-            </a:r>
-          </a:p>
-          <a:p>
-            <a:r>
-              <a:t>LoginEvent.count antes e depois do destroy.</a:t>
+              <a:t>O argumento que fecha: uma GPU testa bilhões de SHA-256 por segundo e</a:t>
+            </a:r>
+          </a:p>
+          <a:p>
+            <a:r>
+              <a:t>algumas dezenas de bcrypt. É a mesma senha, o mesmo vazamento, e a</a:t>
+            </a:r>
+          </a:p>
+          <a:p>
+            <a:r>
+              <a:t>diferença entre quebrar em minutos ou em séculos.</a:t>
+            </a:r>
+          </a:p>
+          <a:p>
+            <a:r>
+              <a:t>Se sobrar tempo, é o momento de fazer a Prática 3 ao vivo antes deles.</a:t>
             </a:r>
           </a:p>
         </p:txBody>
@@ -1299,22 +1784,27 @@
           <a:lstStyle/>
           <a:p>
             <a:r>
-              <a:t>~20 minutos. O momento em que o módulo da Aula 1 deixa de ser teoria.</a:t>
-            </a:r>
-          </a:p>
-          <a:p>
-            <a:r>
-              <a:t>O ponto a martelar: o banco guarda o digest do código, não o código.</a:t>
-            </a:r>
-          </a:p>
-          <a:p>
-            <a:r>
-              <a:t>Mesma lição da senha, aplicada a outra coisa. Se alguém vazar o banco,</a:t>
-            </a:r>
-          </a:p>
-          <a:p>
-            <a:r>
-              <a:t>não consegue confirmar a conta de ninguém.</a:t>
+              <a:t>~10 minutos, sem escrever arquivo nenhum. É o que faz a seção de senha</a:t>
+            </a:r>
+          </a:p>
+          <a:p>
+            <a:r>
+              <a:t>parar de ser teoria.</a:t>
+            </a:r>
+          </a:p>
+          <a:p>
+            <a:r>
+              <a:t>A comparação é o argumento, e o comando é feito para não depender da</a:t>
+            </a:r>
+          </a:p>
+          <a:p>
+            <a:r>
+              <a:t>máquina: mil SHA-256 terminam muito antes de UM bcrypt. Quem rouba um</a:t>
+            </a:r>
+          </a:p>
+          <a:p>
+            <a:r>
+              <a:t>banco testa senha em lote, e é isso que o bcrypt inviabiliza.</a:t>
             </a:r>
           </a:p>
         </p:txBody>
@@ -1384,12 +1874,17 @@
           <a:lstStyle/>
           <a:p>
             <a:r>
-              <a:t>Rode ao vivo. Mostrar o password_digest na tela é o momento em que a</a:t>
-            </a:r>
-          </a:p>
-          <a:p>
-            <a:r>
-              <a:t>ficha cai sobre hashing.</a:t>
+              <a:t>Peça exemplos à turma antes de virar o slide: "que outras coisas duas</a:t>
+            </a:r>
+          </a:p>
+          <a:p>
+            <a:r>
+              <a:t>pessoas escrevem diferente querendo dizer a mesma coisa?" Telefone,</a:t>
+            </a:r>
+          </a:p>
+          <a:p>
+            <a:r>
+              <a:t>CPF, CEP. Normalizar é decidir uma forma canônica e gravar sempre ela.</a:t>
             </a:r>
           </a:p>
         </p:txBody>

--- a/slides/build/aula-02-banco-de-dados-e-activerecord.pptx
+++ b/slides/build/aula-02-banco-de-dados-e-activerecord.pptx
@@ -9100,7 +9100,7 @@
                 <a:cs typeface="Open Sans Extra Bold"/>
                 <a:sym typeface="Open Sans Extra Bold"/>
               </a:rPr>
-              <a:t>Confere: a tabela users fica com 16 colunas.</a:t>
+              <a:t>Confere: a tabela users fica com 15 colunas.</a:t>
             </a:r>
           </a:p>
           <a:p>

--- a/slides/build/aula-02-banco-de-dados-e-activerecord.pptx
+++ b/slides/build/aula-02-banco-de-dados-e-activerecord.pptx
@@ -5250,7 +5250,7 @@
                 <a:cs typeface="Open Sans Extra Bold"/>
                 <a:sym typeface="Open Sans Extra Bold"/>
               </a:rPr>
-              <a:t>Confere: bin/rails runner 'puts BCrypt::Password.create("teste")[0,7]'</a:t>
+              <a:t>VOCÊ DEVE VER: bin/rails runner 'puts BCrypt::Password.create("teste")[0,7]'</a:t>
             </a:r>
           </a:p>
           <a:p>
@@ -9058,7 +9058,7 @@
                 <a:cs typeface="Open Sans Extra Bold"/>
                 <a:sym typeface="Open Sans Extra Bold"/>
               </a:rPr>
-              <a:t>Confere: bin/rails db:migrate:status  -&gt;  três linhas "up"</a:t>
+              <a:t>VOCÊ DEVE VER: bin/rails db:migrate:status  -&gt;  três linhas "up"</a:t>
             </a:r>
           </a:p>
           <a:p>
@@ -9100,7 +9100,7 @@
                 <a:cs typeface="Open Sans Extra Bold"/>
                 <a:sym typeface="Open Sans Extra Bold"/>
               </a:rPr>
-              <a:t>Confere: a tabela users fica com 15 colunas.</a:t>
+              <a:t>VOCÊ DEVE VER: a tabela users fica com 15 colunas.</a:t>
             </a:r>
           </a:p>
           <a:p>
@@ -12645,7 +12645,7 @@
                 <a:cs typeface="Open Sans Extra Bold"/>
                 <a:sym typeface="Open Sans Extra Bold"/>
               </a:rPr>
-              <a:t>Confere: validate("abc") devolve a lista; validate("Automic@2026") devolve []</a:t>
+              <a:t>VOCÊ DEVE VER: validate("abc") devolve a lista; validate("Automic@2026") devolve []</a:t>
             </a:r>
           </a:p>
           <a:p>
@@ -12687,7 +12687,7 @@
                 <a:cs typeface="Open Sans Extra Bold"/>
                 <a:sym typeface="Open Sans Extra Bold"/>
               </a:rPr>
-              <a:t>Confere: um User novo é valid? e tem digest começando em $2a$12$</a:t>
+              <a:t>VOCÊ DEVE VER: um User novo é valid? e tem digest começando em $2a$12$</a:t>
             </a:r>
           </a:p>
           <a:p>
